--- a/slides/Chapter 05 - The Plural Executive (Lecture Deck).pptx
+++ b/slides/Chapter 05 - The Plural Executive (Lecture Deck).pptx
@@ -8805,7 +8805,7 @@
         </p:nvSpPr>
         <p:spPr>
           <a:xfrm>
-            <a:off x="4937760" y="2642616"/>
+            <a:off x="4937760" y="2532888"/>
             <a:ext cx="2377440" cy="274320"/>
           </a:xfrm>
           <a:prstGeom prst="rect">
@@ -8844,7 +8844,7 @@
         </p:nvSpPr>
         <p:spPr>
           <a:xfrm>
-            <a:off x="7406640" y="2624328"/>
+            <a:off x="7406640" y="2514600"/>
             <a:ext cx="4190695" cy="777240"/>
           </a:xfrm>
           <a:prstGeom prst="rect">
@@ -8886,7 +8886,7 @@
         </p:nvSpPr>
         <p:spPr>
           <a:xfrm>
-            <a:off x="4937760" y="3483864"/>
+            <a:off x="4937760" y="3264408"/>
             <a:ext cx="2377440" cy="274320"/>
           </a:xfrm>
           <a:prstGeom prst="rect">
@@ -8925,7 +8925,7 @@
         </p:nvSpPr>
         <p:spPr>
           <a:xfrm>
-            <a:off x="7406640" y="3465576"/>
+            <a:off x="7406640" y="3246120"/>
             <a:ext cx="4190695" cy="777240"/>
           </a:xfrm>
           <a:prstGeom prst="rect">
@@ -8967,7 +8967,7 @@
         </p:nvSpPr>
         <p:spPr>
           <a:xfrm>
-            <a:off x="4937760" y="4325112"/>
+            <a:off x="4937760" y="3995928"/>
             <a:ext cx="2377440" cy="274320"/>
           </a:xfrm>
           <a:prstGeom prst="rect">
@@ -9006,7 +9006,7 @@
         </p:nvSpPr>
         <p:spPr>
           <a:xfrm>
-            <a:off x="7406640" y="4306824"/>
+            <a:off x="7406640" y="3977640"/>
             <a:ext cx="4190695" cy="777240"/>
           </a:xfrm>
           <a:prstGeom prst="rect">
@@ -9048,7 +9048,7 @@
         </p:nvSpPr>
         <p:spPr>
           <a:xfrm>
-            <a:off x="594360" y="4389120"/>
+            <a:off x="594360" y="4846320"/>
             <a:ext cx="11002975" cy="1371600"/>
           </a:xfrm>
           <a:prstGeom prst="roundRect">
@@ -9075,7 +9075,7 @@
         </p:nvSpPr>
         <p:spPr>
           <a:xfrm>
-            <a:off x="868680" y="4553712"/>
+            <a:off x="868680" y="5010912"/>
             <a:ext cx="10454335" cy="329184"/>
           </a:xfrm>
           <a:prstGeom prst="rect">
@@ -9114,7 +9114,7 @@
         </p:nvSpPr>
         <p:spPr>
           <a:xfrm>
-            <a:off x="868680" y="4919472"/>
+            <a:off x="868680" y="5376672"/>
             <a:ext cx="10454335" cy="658368"/>
           </a:xfrm>
           <a:prstGeom prst="rect">

--- a/slides/Chapter 05 - The Plural Executive (Lecture Deck).pptx
+++ b/slides/Chapter 05 - The Plural Executive (Lecture Deck).pptx
@@ -6766,12 +6766,12 @@
         </p:nvSpPr>
         <p:spPr>
           <a:xfrm>
-            <a:off x="594360" y="5687568"/>
-            <a:ext cx="11002975" cy="658368"/>
+            <a:off x="594360" y="5596128"/>
+            <a:ext cx="11002975" cy="749808"/>
           </a:xfrm>
           <a:prstGeom prst="roundRect">
             <a:avLst>
-              <a:gd name="adj" fmla="val 9722"/>
+              <a:gd name="adj" fmla="val 8537"/>
             </a:avLst>
           </a:prstGeom>
           <a:solidFill>
@@ -6793,7 +6793,7 @@
         </p:nvSpPr>
         <p:spPr>
           <a:xfrm>
-            <a:off x="868680" y="5852160"/>
+            <a:off x="868680" y="5760720"/>
             <a:ext cx="10454335" cy="329184"/>
           </a:xfrm>
           <a:prstGeom prst="rect">
@@ -6832,8 +6832,8 @@
         </p:nvSpPr>
         <p:spPr>
           <a:xfrm>
-            <a:off x="868680" y="6217920"/>
-            <a:ext cx="10454335" cy="-54864"/>
+            <a:off x="868680" y="6126480"/>
+            <a:ext cx="10454335" cy="201168"/>
           </a:xfrm>
           <a:prstGeom prst="rect">
             <a:avLst/>
@@ -7452,12 +7452,12 @@
         </p:nvSpPr>
         <p:spPr>
           <a:xfrm>
-            <a:off x="594360" y="5687568"/>
-            <a:ext cx="11002975" cy="658368"/>
+            <a:off x="594360" y="5596128"/>
+            <a:ext cx="11002975" cy="749808"/>
           </a:xfrm>
           <a:prstGeom prst="roundRect">
             <a:avLst>
-              <a:gd name="adj" fmla="val 9722"/>
+              <a:gd name="adj" fmla="val 8537"/>
             </a:avLst>
           </a:prstGeom>
           <a:solidFill>
@@ -7479,7 +7479,7 @@
         </p:nvSpPr>
         <p:spPr>
           <a:xfrm>
-            <a:off x="868680" y="5852160"/>
+            <a:off x="868680" y="5760720"/>
             <a:ext cx="10454335" cy="329184"/>
           </a:xfrm>
           <a:prstGeom prst="rect">
@@ -7518,8 +7518,8 @@
         </p:nvSpPr>
         <p:spPr>
           <a:xfrm>
-            <a:off x="868680" y="6217920"/>
-            <a:ext cx="10454335" cy="-54864"/>
+            <a:off x="868680" y="6126480"/>
+            <a:ext cx="10454335" cy="201168"/>
           </a:xfrm>
           <a:prstGeom prst="rect">
             <a:avLst/>

--- a/slides/Chapter 05 - The Plural Executive (Lecture Deck).pptx
+++ b/slides/Chapter 05 - The Plural Executive (Lecture Deck).pptx
@@ -1180,9 +1180,9 @@
 IF YOU TAUGHT CHAPTER 1 OR 2, this is review. Move fast and get to the
 consequence.
 THE COMPARISON THAT LANDS: the president appoints the entire cabinet and can
-dismiss any of them. The governor of Texas appoints the secretary of state and
-essentially no other principal executive officer. Everyone else was elected by the
-same voters who elected the governor, and often ran against the governor's
+dismiss any of them. The governor of Texas appoints the secretary of state and a
+handful of agency heads, but every other statewide executive officer was elected
+by the same voters who elected the governor, and often ran against the governor's
 positions.
 ASK: "What happens when the governor and the attorney general disagree about
 whether to defend a state law in court?" The honest answer is that it becomes a
@@ -3005,7 +3005,7 @@
                 <a:ea typeface="Calibri" pitchFamily="34" charset="-122"/>
                 <a:cs typeface="Calibri" pitchFamily="34" charset="-120"/>
               </a:rPr>
-              <a:t>Chapter 5 in the Trailblazer Trek: 7 sections, 1,600 points. Students submit the Completion Report.</a:t>
+              <a:t>Chapter 5 in the Trailblazer Trek: 8 sections, 1,600 points. Students submit the Completion Report.</a:t>
             </a:r>
             <a:endParaRPr lang="en-US" sz="1200" dirty="0"/>
           </a:p>
@@ -6671,7 +6671,7 @@
                 <a:ea typeface="Calibri" pitchFamily="34" charset="-122"/>
                 <a:cs typeface="Calibri" pitchFamily="34" charset="-120"/>
               </a:rPr>
-              <a:t>Name thousands of people to boards, commissions, and university regencies over a full term, subject to Senate confirmation.</a:t>
+              <a:t>Name roughly 1,500 people per term to boards, commissions, and university regencies, subject to Senate confirmation; over multiple terms that becomes thousands.</a:t>
             </a:r>
             <a:endParaRPr lang="en-US" sz="1250" dirty="0"/>
           </a:p>
@@ -7357,7 +7357,7 @@
                 <a:ea typeface="Calibri" pitchFamily="34" charset="-122"/>
                 <a:cs typeface="Calibri" pitchFamily="34" charset="-120"/>
               </a:rPr>
-              <a:t>Runs the General Land Office, manages state lands and the Permanent School Fund, and administers the Alamo.</a:t>
+              <a:t>Runs the General Land Office, manages state lands and the Permanent School Fund's land and mineral holdings, and administers the Alamo.</a:t>
             </a:r>
             <a:endParaRPr lang="en-US" sz="1250" dirty="0"/>
           </a:p>
